--- a/Лекции/ООП 1 лек 7.pptx
+++ b/Лекции/ООП 1 лек 7.pptx
@@ -229,7 +229,7 @@
             <a:fld id="{AA2F9473-F066-431E-A6E8-1D478C995A6B}" type="datetimeFigureOut">
               <a:rPr lang="en-US" smtClean="0"/>
               <a:pPr/>
-              <a:t>5/12/2025</a:t>
+              <a:t>4/22/2026</a:t>
             </a:fld>
             <a:endParaRPr lang="en-US"/>
           </a:p>
@@ -2160,7 +2160,7 @@
           </a:lstStyle>
           <a:p>
             <a:r>
-              <a:rPr lang="ru-RU"/>
+              <a:rPr lang="ru-RU" dirty="0"/>
               <a:t>Образец заголовка</a:t>
             </a:r>
             <a:endParaRPr lang="en-US" dirty="0"/>
@@ -2225,7 +2225,7 @@
           </a:lstStyle>
           <a:p>
             <a:r>
-              <a:rPr lang="ru-RU"/>
+              <a:rPr lang="ru-RU" dirty="0"/>
               <a:t>Образец подзаголовка</a:t>
             </a:r>
             <a:endParaRPr lang="en-US" dirty="0"/>
@@ -2396,7 +2396,7 @@
           <a:lstStyle>
             <a:lvl1pPr algn="ctr">
               <a:defRPr sz="2700" b="1">
-                <a:latin typeface="Times New Roman" panose="02020603050405020304" pitchFamily="18" charset="0"/>
+                <a:latin typeface="Bookman Old Style" panose="02050604050505020204" pitchFamily="18" charset="0"/>
                 <a:cs typeface="Times New Roman" panose="02020603050405020304" pitchFamily="18" charset="0"/>
               </a:defRPr>
             </a:lvl1pPr>
@@ -2793,7 +2793,7 @@
           <a:solidFill>
             <a:schemeClr val="tx1"/>
           </a:solidFill>
-          <a:latin typeface="+mj-lt"/>
+          <a:latin typeface="Bookman Old Style" panose="02050604050505020204" pitchFamily="18" charset="0"/>
           <a:ea typeface="+mj-ea"/>
           <a:cs typeface="+mj-cs"/>
         </a:defRPr>
@@ -2813,7 +2813,7 @@
           <a:solidFill>
             <a:schemeClr val="tx1"/>
           </a:solidFill>
-          <a:latin typeface="+mn-lt"/>
+          <a:latin typeface="Bookman Old Style" panose="02050604050505020204" pitchFamily="18" charset="0"/>
           <a:ea typeface="+mn-ea"/>
           <a:cs typeface="+mn-cs"/>
         </a:defRPr>
@@ -2831,7 +2831,7 @@
           <a:solidFill>
             <a:schemeClr val="tx1"/>
           </a:solidFill>
-          <a:latin typeface="+mn-lt"/>
+          <a:latin typeface="Bookman Old Style" panose="02050604050505020204" pitchFamily="18" charset="0"/>
           <a:ea typeface="+mn-ea"/>
           <a:cs typeface="+mn-cs"/>
         </a:defRPr>
@@ -2849,7 +2849,7 @@
           <a:solidFill>
             <a:schemeClr val="tx1"/>
           </a:solidFill>
-          <a:latin typeface="+mn-lt"/>
+          <a:latin typeface="Bookman Old Style" panose="02050604050505020204" pitchFamily="18" charset="0"/>
           <a:ea typeface="+mn-ea"/>
           <a:cs typeface="+mn-cs"/>
         </a:defRPr>
@@ -2867,7 +2867,7 @@
           <a:solidFill>
             <a:schemeClr val="tx1"/>
           </a:solidFill>
-          <a:latin typeface="+mn-lt"/>
+          <a:latin typeface="Bookman Old Style" panose="02050604050505020204" pitchFamily="18" charset="0"/>
           <a:ea typeface="+mn-ea"/>
           <a:cs typeface="+mn-cs"/>
         </a:defRPr>
@@ -2885,7 +2885,7 @@
           <a:solidFill>
             <a:schemeClr val="tx1"/>
           </a:solidFill>
-          <a:latin typeface="+mn-lt"/>
+          <a:latin typeface="Bookman Old Style" panose="02050604050505020204" pitchFamily="18" charset="0"/>
           <a:ea typeface="+mn-ea"/>
           <a:cs typeface="+mn-cs"/>
         </a:defRPr>

--- a/Лекции/ООП 1 лек 7.pptx
+++ b/Лекции/ООП 1 лек 7.pptx
@@ -5,7 +5,7 @@
     <p:sldMasterId id="2147483674" r:id="rId1"/>
   </p:sldMasterIdLst>
   <p:notesMasterIdLst>
-    <p:notesMasterId r:id="rId20"/>
+    <p:notesMasterId r:id="rId19"/>
   </p:notesMasterIdLst>
   <p:sldIdLst>
     <p:sldId id="273" r:id="rId2"/>
@@ -24,8 +24,7 @@
     <p:sldId id="286" r:id="rId15"/>
     <p:sldId id="287" r:id="rId16"/>
     <p:sldId id="288" r:id="rId17"/>
-    <p:sldId id="289" r:id="rId18"/>
-    <p:sldId id="290" r:id="rId19"/>
+    <p:sldId id="290" r:id="rId18"/>
   </p:sldIdLst>
   <p:sldSz cx="12192000" cy="6858000"/>
   <p:notesSz cx="6858000" cy="9144000"/>
@@ -229,7 +228,7 @@
             <a:fld id="{AA2F9473-F066-431E-A6E8-1D478C995A6B}" type="datetimeFigureOut">
               <a:rPr lang="en-US" smtClean="0"/>
               <a:pPr/>
-              <a:t>4/22/2026</a:t>
+              <a:t>4/28/2026</a:t>
             </a:fld>
             <a:endParaRPr lang="en-US"/>
           </a:p>
@@ -1290,96 +1289,6 @@
               <a:rPr lang="en-US" smtClean="0"/>
               <a:pPr/>
               <a:t>17</a:t>
-            </a:fld>
-            <a:endParaRPr lang="en-US"/>
-          </a:p>
-        </p:txBody>
-      </p:sp>
-    </p:spTree>
-    <p:extLst>
-      <p:ext uri="{BB962C8B-B14F-4D97-AF65-F5344CB8AC3E}">
-        <p14:creationId xmlns:p14="http://schemas.microsoft.com/office/powerpoint/2010/main" val="4157689919"/>
-      </p:ext>
-    </p:extLst>
-  </p:cSld>
-  <p:clrMapOvr>
-    <a:masterClrMapping/>
-  </p:clrMapOvr>
-</p:notes>
-</file>
-
-<file path=ppt/notesSlides/notesSlide18.xml><?xml version="1.0" encoding="utf-8"?>
-<p:notes xmlns:a="http://schemas.openxmlformats.org/drawingml/2006/main" xmlns:r="http://schemas.openxmlformats.org/officeDocument/2006/relationships" xmlns:p="http://schemas.openxmlformats.org/presentationml/2006/main">
-  <p:cSld>
-    <p:spTree>
-      <p:nvGrpSpPr>
-        <p:cNvPr id="1" name=""/>
-        <p:cNvGrpSpPr/>
-        <p:nvPr/>
-      </p:nvGrpSpPr>
-      <p:grpSpPr>
-        <a:xfrm>
-          <a:off x="0" y="0"/>
-          <a:ext cx="0" cy="0"/>
-          <a:chOff x="0" y="0"/>
-          <a:chExt cx="0" cy="0"/>
-        </a:xfrm>
-      </p:grpSpPr>
-      <p:sp>
-        <p:nvSpPr>
-          <p:cNvPr id="2" name="Образ слайда 1"/>
-          <p:cNvSpPr>
-            <a:spLocks noGrp="1" noRot="1" noChangeAspect="1"/>
-          </p:cNvSpPr>
-          <p:nvPr>
-            <p:ph type="sldImg"/>
-          </p:nvPr>
-        </p:nvSpPr>
-        <p:spPr>
-          <a:xfrm>
-            <a:off x="685800" y="1143000"/>
-            <a:ext cx="5486400" cy="3086100"/>
-          </a:xfrm>
-        </p:spPr>
-      </p:sp>
-      <p:sp>
-        <p:nvSpPr>
-          <p:cNvPr id="3" name="Заметки 2"/>
-          <p:cNvSpPr>
-            <a:spLocks noGrp="1"/>
-          </p:cNvSpPr>
-          <p:nvPr>
-            <p:ph type="body" idx="1"/>
-          </p:nvPr>
-        </p:nvSpPr>
-        <p:spPr/>
-        <p:txBody>
-          <a:bodyPr/>
-          <a:lstStyle/>
-          <a:p>
-            <a:endParaRPr lang="ru-RU" dirty="0"/>
-          </a:p>
-        </p:txBody>
-      </p:sp>
-      <p:sp>
-        <p:nvSpPr>
-          <p:cNvPr id="4" name="Номер слайда 3"/>
-          <p:cNvSpPr>
-            <a:spLocks noGrp="1"/>
-          </p:cNvSpPr>
-          <p:nvPr>
-            <p:ph type="sldNum" sz="quarter" idx="10"/>
-          </p:nvPr>
-        </p:nvSpPr>
-        <p:spPr/>
-        <p:txBody>
-          <a:bodyPr/>
-          <a:lstStyle/>
-          <a:p>
-            <a:fld id="{F0F4E2F1-1521-4C3A-A563-2F7D19AB6E0B}" type="slidenum">
-              <a:rPr lang="en-US" smtClean="0"/>
-              <a:pPr/>
-              <a:t>18</a:t>
             </a:fld>
             <a:endParaRPr lang="en-US"/>
           </a:p>
@@ -3439,15 +3348,15 @@
         </p:nvSpPr>
         <p:spPr>
           <a:xfrm>
-            <a:off x="266700" y="-15564"/>
-            <a:ext cx="11477625" cy="6740307"/>
+            <a:off x="0" y="-15564"/>
+            <a:ext cx="12192000" cy="6740307"/>
           </a:xfrm>
           <a:prstGeom prst="rect">
             <a:avLst/>
           </a:prstGeom>
         </p:spPr>
         <p:txBody>
-          <a:bodyPr wrap="square">
+          <a:bodyPr wrap="square" lIns="360000" rIns="360000">
             <a:spAutoFit/>
           </a:bodyPr>
           <a:lstStyle/>
@@ -4287,15 +4196,15 @@
         </p:nvSpPr>
         <p:spPr>
           <a:xfrm>
-            <a:off x="219075" y="0"/>
-            <a:ext cx="11515726" cy="6740307"/>
+            <a:off x="0" y="0"/>
+            <a:ext cx="12192000" cy="6740307"/>
           </a:xfrm>
           <a:prstGeom prst="rect">
             <a:avLst/>
           </a:prstGeom>
         </p:spPr>
         <p:txBody>
-          <a:bodyPr wrap="square">
+          <a:bodyPr wrap="square" lIns="360000" rIns="360000">
             <a:spAutoFit/>
           </a:bodyPr>
           <a:lstStyle/>
@@ -5050,15 +4959,15 @@
         </p:nvSpPr>
         <p:spPr>
           <a:xfrm>
-            <a:off x="390524" y="0"/>
-            <a:ext cx="11363326" cy="3970318"/>
+            <a:off x="0" y="0"/>
+            <a:ext cx="12192000" cy="3970318"/>
           </a:xfrm>
           <a:prstGeom prst="rect">
             <a:avLst/>
           </a:prstGeom>
         </p:spPr>
         <p:txBody>
-          <a:bodyPr wrap="square">
+          <a:bodyPr wrap="square" lIns="360000" rIns="360000">
             <a:spAutoFit/>
           </a:bodyPr>
           <a:lstStyle/>
@@ -5258,15 +5167,15 @@
         </p:nvSpPr>
         <p:spPr>
           <a:xfrm>
-            <a:off x="390524" y="0"/>
-            <a:ext cx="11363326" cy="4893647"/>
+            <a:off x="0" y="0"/>
+            <a:ext cx="12192000" cy="4893647"/>
           </a:xfrm>
           <a:prstGeom prst="rect">
             <a:avLst/>
           </a:prstGeom>
         </p:spPr>
         <p:txBody>
-          <a:bodyPr wrap="square">
+          <a:bodyPr wrap="square" lIns="360000" rIns="360000">
             <a:spAutoFit/>
           </a:bodyPr>
           <a:lstStyle/>
@@ -5983,15 +5892,15 @@
         </p:nvSpPr>
         <p:spPr>
           <a:xfrm>
-            <a:off x="333375" y="0"/>
-            <a:ext cx="11458576" cy="3970318"/>
+            <a:off x="0" y="0"/>
+            <a:ext cx="12192000" cy="3970318"/>
           </a:xfrm>
           <a:prstGeom prst="rect">
             <a:avLst/>
           </a:prstGeom>
         </p:spPr>
         <p:txBody>
-          <a:bodyPr wrap="square">
+          <a:bodyPr wrap="square" lIns="360000" rIns="360000">
             <a:spAutoFit/>
           </a:bodyPr>
           <a:lstStyle/>
@@ -6191,15 +6100,15 @@
         </p:nvSpPr>
         <p:spPr>
           <a:xfrm>
-            <a:off x="266700" y="0"/>
-            <a:ext cx="11553825" cy="6555641"/>
+            <a:off x="0" y="0"/>
+            <a:ext cx="12192000" cy="6555641"/>
           </a:xfrm>
           <a:prstGeom prst="rect">
             <a:avLst/>
           </a:prstGeom>
         </p:spPr>
         <p:txBody>
-          <a:bodyPr wrap="square">
+          <a:bodyPr wrap="square" lIns="360000" rIns="360000">
             <a:spAutoFit/>
           </a:bodyPr>
           <a:lstStyle/>
@@ -7267,15 +7176,15 @@
         </p:nvSpPr>
         <p:spPr>
           <a:xfrm>
-            <a:off x="247650" y="0"/>
-            <a:ext cx="11687175" cy="6370975"/>
+            <a:off x="0" y="0"/>
+            <a:ext cx="12192000" cy="6370975"/>
           </a:xfrm>
           <a:prstGeom prst="rect">
             <a:avLst/>
           </a:prstGeom>
         </p:spPr>
         <p:txBody>
-          <a:bodyPr wrap="square">
+          <a:bodyPr wrap="square" lIns="360000" rIns="360000">
             <a:spAutoFit/>
           </a:bodyPr>
           <a:lstStyle/>
@@ -8320,359 +8229,6 @@
 </file>
 
 <file path=ppt/slides/slide17.xml><?xml version="1.0" encoding="utf-8"?>
-<p:sld xmlns:a="http://schemas.openxmlformats.org/drawingml/2006/main" xmlns:r="http://schemas.openxmlformats.org/officeDocument/2006/relationships" xmlns:p="http://schemas.openxmlformats.org/presentationml/2006/main">
-  <p:cSld>
-    <p:spTree>
-      <p:nvGrpSpPr>
-        <p:cNvPr id="1" name=""/>
-        <p:cNvGrpSpPr/>
-        <p:nvPr/>
-      </p:nvGrpSpPr>
-      <p:grpSpPr>
-        <a:xfrm>
-          <a:off x="0" y="0"/>
-          <a:ext cx="0" cy="0"/>
-          <a:chOff x="0" y="0"/>
-          <a:chExt cx="0" cy="0"/>
-        </a:xfrm>
-      </p:grpSpPr>
-      <p:sp>
-        <p:nvSpPr>
-          <p:cNvPr id="7" name="Rectangle 1"/>
-          <p:cNvSpPr>
-            <a:spLocks noChangeArrowheads="1"/>
-          </p:cNvSpPr>
-          <p:nvPr/>
-        </p:nvSpPr>
-        <p:spPr bwMode="auto">
-          <a:xfrm>
-            <a:off x="963944" y="6472639"/>
-            <a:ext cx="184731" cy="830997"/>
-          </a:xfrm>
-          <a:prstGeom prst="rect">
-            <a:avLst/>
-          </a:prstGeom>
-          <a:noFill/>
-          <a:ln>
-            <a:noFill/>
-          </a:ln>
-          <a:effectLst/>
-          <a:extLst>
-            <a:ext uri="{909E8E84-426E-40DD-AFC4-6F175D3DCCD1}">
-              <a14:hiddenFill xmlns:a14="http://schemas.microsoft.com/office/drawing/2010/main">
-                <a:solidFill>
-                  <a:schemeClr val="accent1"/>
-                </a:solidFill>
-              </a14:hiddenFill>
-            </a:ext>
-            <a:ext uri="{91240B29-F687-4F45-9708-019B960494DF}">
-              <a14:hiddenLine xmlns:a14="http://schemas.microsoft.com/office/drawing/2010/main" w="9525">
-                <a:solidFill>
-                  <a:schemeClr val="tx1"/>
-                </a:solidFill>
-                <a:miter lim="800000"/>
-                <a:headEnd/>
-                <a:tailEnd/>
-              </a14:hiddenLine>
-            </a:ext>
-            <a:ext uri="{AF507438-7753-43E0-B8FC-AC1667EBCBE1}">
-              <a14:hiddenEffects xmlns:a14="http://schemas.microsoft.com/office/drawing/2010/main">
-                <a:effectLst>
-                  <a:outerShdw dist="35921" dir="2700000" algn="ctr" rotWithShape="0">
-                    <a:schemeClr val="bg2"/>
-                  </a:outerShdw>
-                </a:effectLst>
-              </a14:hiddenEffects>
-            </a:ext>
-          </a:extLst>
-        </p:spPr>
-        <p:txBody>
-          <a:bodyPr vert="horz" wrap="none" lIns="91440" tIns="45720" rIns="91440" bIns="45720" numCol="1" anchor="ctr" anchorCtr="0" compatLnSpc="1">
-            <a:prstTxWarp prst="textNoShape">
-              <a:avLst/>
-            </a:prstTxWarp>
-            <a:spAutoFit/>
-          </a:bodyPr>
-          <a:lstStyle/>
-          <a:p>
-            <a:pPr marL="0" marR="0" lvl="0" indent="0" algn="l" defTabSz="914400" rtl="0" eaLnBrk="0" fontAlgn="base" latinLnBrk="0" hangingPunct="0">
-              <a:lnSpc>
-                <a:spcPct val="100000"/>
-              </a:lnSpc>
-              <a:spcBef>
-                <a:spcPct val="0"/>
-              </a:spcBef>
-              <a:spcAft>
-                <a:spcPct val="0"/>
-              </a:spcAft>
-              <a:buClrTx/>
-              <a:buSzTx/>
-              <a:buFontTx/>
-              <a:buNone/>
-              <a:tabLst/>
-            </a:pPr>
-            <a:r>
-              <a:rPr kumimoji="0" lang="ru-RU" altLang="ru-RU" sz="2400" b="0" i="0" u="none" strike="noStrike" cap="none" normalizeH="0" baseline="0" smtClean="0">
-                <a:ln>
-                  <a:noFill/>
-                </a:ln>
-                <a:solidFill>
-                  <a:schemeClr val="tx1"/>
-                </a:solidFill>
-                <a:effectLst/>
-                <a:latin typeface="Arial" panose="020B0604020202020204" pitchFamily="34" charset="0"/>
-              </a:rPr>
-              <a:t/>
-            </a:r>
-            <a:br>
-              <a:rPr kumimoji="0" lang="ru-RU" altLang="ru-RU" sz="2400" b="0" i="0" u="none" strike="noStrike" cap="none" normalizeH="0" baseline="0" smtClean="0">
-                <a:ln>
-                  <a:noFill/>
-                </a:ln>
-                <a:solidFill>
-                  <a:schemeClr val="tx1"/>
-                </a:solidFill>
-                <a:effectLst/>
-                <a:latin typeface="Arial" panose="020B0604020202020204" pitchFamily="34" charset="0"/>
-              </a:rPr>
-            </a:br>
-            <a:endParaRPr kumimoji="0" lang="ru-RU" altLang="ru-RU" sz="2400" b="0" i="0" u="none" strike="noStrike" cap="none" normalizeH="0" baseline="0" smtClean="0">
-              <a:ln>
-                <a:noFill/>
-              </a:ln>
-              <a:solidFill>
-                <a:schemeClr val="tx1"/>
-              </a:solidFill>
-              <a:effectLst/>
-              <a:latin typeface="Arial" panose="020B0604020202020204" pitchFamily="34" charset="0"/>
-            </a:endParaRPr>
-          </a:p>
-        </p:txBody>
-      </p:sp>
-      <p:sp>
-        <p:nvSpPr>
-          <p:cNvPr id="3" name="Прямоугольник 2"/>
-          <p:cNvSpPr/>
-          <p:nvPr/>
-        </p:nvSpPr>
-        <p:spPr>
-          <a:xfrm>
-            <a:off x="0" y="0"/>
-            <a:ext cx="12192000" cy="3416320"/>
-          </a:xfrm>
-          <a:prstGeom prst="rect">
-            <a:avLst/>
-          </a:prstGeom>
-        </p:spPr>
-        <p:txBody>
-          <a:bodyPr wrap="square">
-            <a:spAutoFit/>
-          </a:bodyPr>
-          <a:lstStyle/>
-          <a:p>
-            <a:pPr algn="just"/>
-            <a:endParaRPr lang="ru-RU" sz="2400" dirty="0" smtClean="0">
-              <a:latin typeface="Bookman Old Style" panose="02050604050505020204" pitchFamily="18" charset="0"/>
-            </a:endParaRPr>
-          </a:p>
-          <a:p>
-            <a:pPr algn="ctr"/>
-            <a:r>
-              <a:rPr lang="ru-RU" sz="2400" b="1" dirty="0" smtClean="0">
-                <a:latin typeface="Bookman Old Style" panose="02050604050505020204" pitchFamily="18" charset="0"/>
-              </a:rPr>
-              <a:t>Темы для самостоятельного изучения</a:t>
-            </a:r>
-          </a:p>
-          <a:p>
-            <a:pPr algn="just"/>
-            <a:r>
-              <a:rPr lang="ru-RU" sz="2400" b="1" dirty="0" smtClean="0">
-                <a:latin typeface="Bookman Old Style" panose="02050604050505020204" pitchFamily="18" charset="0"/>
-              </a:rPr>
-              <a:t>Рефлексия: </a:t>
-            </a:r>
-            <a:r>
-              <a:rPr lang="it-IT" sz="2400" dirty="0" smtClean="0">
-                <a:latin typeface="Bookman Old Style" panose="02050604050505020204" pitchFamily="18" charset="0"/>
-                <a:hlinkClick r:id="rId3"/>
-              </a:rPr>
-              <a:t>https</a:t>
-            </a:r>
-            <a:r>
-              <a:rPr lang="it-IT" sz="2400" dirty="0">
-                <a:latin typeface="Bookman Old Style" panose="02050604050505020204" pitchFamily="18" charset="0"/>
-                <a:hlinkClick r:id="rId3"/>
-              </a:rPr>
-              <a:t>://</a:t>
-            </a:r>
-            <a:r>
-              <a:rPr lang="it-IT" sz="2400" dirty="0" smtClean="0">
-                <a:latin typeface="Bookman Old Style" panose="02050604050505020204" pitchFamily="18" charset="0"/>
-                <a:hlinkClick r:id="rId3"/>
-              </a:rPr>
-              <a:t>metanit.com/sharp/tutorial/14.1.php</a:t>
-            </a:r>
-            <a:endParaRPr lang="ru-RU" sz="2400" dirty="0" smtClean="0">
-              <a:latin typeface="Bookman Old Style" panose="02050604050505020204" pitchFamily="18" charset="0"/>
-            </a:endParaRPr>
-          </a:p>
-          <a:p>
-            <a:pPr algn="just"/>
-            <a:r>
-              <a:rPr lang="ru-RU" sz="2400" b="1" dirty="0" smtClean="0">
-                <a:latin typeface="Bookman Old Style" panose="02050604050505020204" pitchFamily="18" charset="0"/>
-              </a:rPr>
-              <a:t>Управление памятью: </a:t>
-            </a:r>
-            <a:r>
-              <a:rPr lang="en-US" sz="2400" dirty="0">
-                <a:latin typeface="Bookman Old Style" panose="02050604050505020204" pitchFamily="18" charset="0"/>
-                <a:hlinkClick r:id="rId4"/>
-              </a:rPr>
-              <a:t>https://</a:t>
-            </a:r>
-            <a:r>
-              <a:rPr lang="en-US" sz="2400" dirty="0" smtClean="0">
-                <a:latin typeface="Bookman Old Style" panose="02050604050505020204" pitchFamily="18" charset="0"/>
-                <a:hlinkClick r:id="rId4"/>
-              </a:rPr>
-              <a:t>metanit.com/sharp/tutorial/8.1.php</a:t>
-            </a:r>
-            <a:endParaRPr lang="ru-RU" sz="2400" dirty="0" smtClean="0">
-              <a:latin typeface="Bookman Old Style" panose="02050604050505020204" pitchFamily="18" charset="0"/>
-            </a:endParaRPr>
-          </a:p>
-          <a:p>
-            <a:pPr algn="just"/>
-            <a:r>
-              <a:rPr lang="ru-RU" sz="2400" b="1" dirty="0" smtClean="0">
-                <a:latin typeface="Bookman Old Style" panose="02050604050505020204" pitchFamily="18" charset="0"/>
-              </a:rPr>
-              <a:t>Клиент-серверные приложения: </a:t>
-            </a:r>
-            <a:r>
-              <a:rPr lang="en-US" sz="2400" dirty="0">
-                <a:latin typeface="Bookman Old Style" panose="02050604050505020204" pitchFamily="18" charset="0"/>
-                <a:hlinkClick r:id="rId5"/>
-              </a:rPr>
-              <a:t>https://</a:t>
-            </a:r>
-            <a:r>
-              <a:rPr lang="en-US" sz="2400" dirty="0" smtClean="0">
-                <a:latin typeface="Bookman Old Style" panose="02050604050505020204" pitchFamily="18" charset="0"/>
-                <a:hlinkClick r:id="rId5"/>
-              </a:rPr>
-              <a:t>metanit.com/sharp/net/3.4.php</a:t>
-            </a:r>
-            <a:endParaRPr lang="ru-RU" sz="2400" dirty="0" smtClean="0">
-              <a:latin typeface="Bookman Old Style" panose="02050604050505020204" pitchFamily="18" charset="0"/>
-            </a:endParaRPr>
-          </a:p>
-          <a:p>
-            <a:pPr algn="just"/>
-            <a:r>
-              <a:rPr lang="en-US" sz="2400" b="1" dirty="0" smtClean="0">
-                <a:latin typeface="Bookman Old Style" panose="02050604050505020204" pitchFamily="18" charset="0"/>
-              </a:rPr>
-              <a:t>Web </a:t>
-            </a:r>
-            <a:r>
-              <a:rPr lang="ru-RU" sz="2400" b="1" dirty="0" smtClean="0">
-                <a:latin typeface="Bookman Old Style" panose="02050604050505020204" pitchFamily="18" charset="0"/>
-              </a:rPr>
-              <a:t>приложения: </a:t>
-            </a:r>
-            <a:r>
-              <a:rPr lang="en-US" sz="2400" dirty="0">
-                <a:latin typeface="Bookman Old Style" panose="02050604050505020204" pitchFamily="18" charset="0"/>
-                <a:hlinkClick r:id="rId6"/>
-              </a:rPr>
-              <a:t>https://</a:t>
-            </a:r>
-            <a:r>
-              <a:rPr lang="en-US" sz="2400" dirty="0" smtClean="0">
-                <a:latin typeface="Bookman Old Style" panose="02050604050505020204" pitchFamily="18" charset="0"/>
-                <a:hlinkClick r:id="rId6"/>
-              </a:rPr>
-              <a:t>metanit.com/sharp/aspnet6/1.1.php</a:t>
-            </a:r>
-            <a:r>
-              <a:rPr lang="ru-RU" sz="2400" dirty="0" smtClean="0">
-                <a:latin typeface="Bookman Old Style" panose="02050604050505020204" pitchFamily="18" charset="0"/>
-              </a:rPr>
-              <a:t>   </a:t>
-            </a:r>
-            <a:endParaRPr lang="en-US" sz="2400" dirty="0" smtClean="0">
-              <a:latin typeface="Bookman Old Style" panose="02050604050505020204" pitchFamily="18" charset="0"/>
-            </a:endParaRPr>
-          </a:p>
-          <a:p>
-            <a:pPr algn="just"/>
-            <a:endParaRPr lang="en-US" sz="2400" b="0" dirty="0">
-              <a:effectLst/>
-              <a:latin typeface="Bookman Old Style" panose="02050604050505020204" pitchFamily="18" charset="0"/>
-            </a:endParaRPr>
-          </a:p>
-          <a:p>
-            <a:pPr algn="ctr"/>
-            <a:r>
-              <a:rPr lang="ru-RU" sz="2400" b="1" dirty="0" smtClean="0">
-                <a:latin typeface="Bookman Old Style" panose="02050604050505020204" pitchFamily="18" charset="0"/>
-              </a:rPr>
-              <a:t>Бесплатные курсы по программированию</a:t>
-            </a:r>
-          </a:p>
-          <a:p>
-            <a:pPr algn="just"/>
-            <a:r>
-              <a:rPr lang="it-IT" sz="2400" dirty="0">
-                <a:latin typeface="Bookman Old Style" panose="02050604050505020204" pitchFamily="18" charset="0"/>
-                <a:hlinkClick r:id="rId7"/>
-              </a:rPr>
-              <a:t>https://ulearn.me</a:t>
-            </a:r>
-            <a:r>
-              <a:rPr lang="it-IT" sz="2400" dirty="0" smtClean="0">
-                <a:latin typeface="Bookman Old Style" panose="02050604050505020204" pitchFamily="18" charset="0"/>
-                <a:hlinkClick r:id="rId7"/>
-              </a:rPr>
-              <a:t>/</a:t>
-            </a:r>
-            <a:r>
-              <a:rPr lang="ru-RU" sz="2400" dirty="0" smtClean="0">
-                <a:latin typeface="Bookman Old Style" panose="02050604050505020204" pitchFamily="18" charset="0"/>
-              </a:rPr>
-              <a:t> </a:t>
-            </a:r>
-            <a:endParaRPr lang="it-IT" sz="2400" b="0" dirty="0">
-              <a:effectLst/>
-              <a:latin typeface="Bookman Old Style" panose="02050604050505020204" pitchFamily="18" charset="0"/>
-            </a:endParaRPr>
-          </a:p>
-        </p:txBody>
-      </p:sp>
-    </p:spTree>
-    <p:extLst>
-      <p:ext uri="{BB962C8B-B14F-4D97-AF65-F5344CB8AC3E}">
-        <p14:creationId xmlns:p14="http://schemas.microsoft.com/office/powerpoint/2010/main" val="1743313510"/>
-      </p:ext>
-    </p:extLst>
-  </p:cSld>
-  <p:clrMapOvr>
-    <a:masterClrMapping/>
-  </p:clrMapOvr>
-  <p:timing>
-    <p:tnLst>
-      <p:par>
-        <p:cTn id="1" dur="indefinite" restart="never" nodeType="tmRoot"/>
-      </p:par>
-    </p:tnLst>
-  </p:timing>
-</p:sld>
-</file>
-
-<file path=ppt/slides/slide18.xml><?xml version="1.0" encoding="utf-8"?>
 <p:sld xmlns:a="http://schemas.openxmlformats.org/drawingml/2006/main" xmlns:r="http://schemas.openxmlformats.org/officeDocument/2006/relationships" xmlns:p="http://schemas.openxmlformats.org/presentationml/2006/main">
   <p:cSld>
     <p:spTree>
@@ -8950,15 +8506,15 @@
         </p:nvSpPr>
         <p:spPr>
           <a:xfrm>
-            <a:off x="333632" y="691338"/>
-            <a:ext cx="11497963" cy="4524315"/>
+            <a:off x="0" y="654356"/>
+            <a:ext cx="12192000" cy="4524315"/>
           </a:xfrm>
           <a:prstGeom prst="rect">
             <a:avLst/>
           </a:prstGeom>
         </p:spPr>
         <p:txBody>
-          <a:bodyPr wrap="square">
+          <a:bodyPr wrap="square" lIns="360000" rIns="360000">
             <a:spAutoFit/>
           </a:bodyPr>
           <a:lstStyle/>
@@ -9139,15 +8695,15 @@
         </p:nvSpPr>
         <p:spPr>
           <a:xfrm>
-            <a:off x="234778" y="691338"/>
-            <a:ext cx="11957222" cy="4893647"/>
+            <a:off x="0" y="691338"/>
+            <a:ext cx="12192000" cy="4893647"/>
           </a:xfrm>
           <a:prstGeom prst="rect">
             <a:avLst/>
           </a:prstGeom>
         </p:spPr>
         <p:txBody>
-          <a:bodyPr wrap="square">
+          <a:bodyPr wrap="square" lIns="360000" rIns="360000">
             <a:spAutoFit/>
           </a:bodyPr>
           <a:lstStyle/>
@@ -9634,8 +9190,8 @@
         </p:blipFill>
         <p:spPr>
           <a:xfrm>
-            <a:off x="8540837" y="4234875"/>
-            <a:ext cx="1264909" cy="1350110"/>
+            <a:off x="8656321" y="3902674"/>
+            <a:ext cx="1576146" cy="1682311"/>
           </a:xfrm>
           <a:prstGeom prst="rect">
             <a:avLst/>
@@ -9687,15 +9243,15 @@
         </p:nvSpPr>
         <p:spPr>
           <a:xfrm>
-            <a:off x="358346" y="0"/>
-            <a:ext cx="11504140" cy="6370975"/>
+            <a:off x="0" y="0"/>
+            <a:ext cx="12192000" cy="6370975"/>
           </a:xfrm>
           <a:prstGeom prst="rect">
             <a:avLst/>
           </a:prstGeom>
         </p:spPr>
         <p:txBody>
-          <a:bodyPr wrap="square">
+          <a:bodyPr wrap="square" lIns="360000" rIns="360000">
             <a:spAutoFit/>
           </a:bodyPr>
           <a:lstStyle/>
@@ -10217,15 +9773,15 @@
         </p:nvSpPr>
         <p:spPr>
           <a:xfrm>
-            <a:off x="345988" y="0"/>
-            <a:ext cx="11392931" cy="6740307"/>
+            <a:off x="0" y="0"/>
+            <a:ext cx="12192000" cy="6740307"/>
           </a:xfrm>
           <a:prstGeom prst="rect">
             <a:avLst/>
           </a:prstGeom>
         </p:spPr>
         <p:txBody>
-          <a:bodyPr wrap="square">
+          <a:bodyPr wrap="square" lIns="360000" rIns="360000">
             <a:spAutoFit/>
           </a:bodyPr>
           <a:lstStyle/>
@@ -11075,15 +10631,15 @@
         </p:nvSpPr>
         <p:spPr>
           <a:xfrm>
-            <a:off x="228599" y="0"/>
-            <a:ext cx="11696701" cy="4524315"/>
+            <a:off x="0" y="0"/>
+            <a:ext cx="12191999" cy="4524315"/>
           </a:xfrm>
           <a:prstGeom prst="rect">
             <a:avLst/>
           </a:prstGeom>
         </p:spPr>
         <p:txBody>
-          <a:bodyPr wrap="square">
+          <a:bodyPr wrap="square" lIns="360000" rIns="360000">
             <a:spAutoFit/>
           </a:bodyPr>
           <a:lstStyle/>
@@ -11326,15 +10882,15 @@
         </p:nvSpPr>
         <p:spPr>
           <a:xfrm>
-            <a:off x="400050" y="0"/>
-            <a:ext cx="11306176" cy="5816977"/>
+            <a:off x="0" y="0"/>
+            <a:ext cx="12192000" cy="5816977"/>
           </a:xfrm>
           <a:prstGeom prst="rect">
             <a:avLst/>
           </a:prstGeom>
         </p:spPr>
         <p:txBody>
-          <a:bodyPr wrap="square">
+          <a:bodyPr wrap="square" lIns="360000" rIns="360000">
             <a:spAutoFit/>
           </a:bodyPr>
           <a:lstStyle/>
@@ -11750,15 +11306,15 @@
         </p:nvSpPr>
         <p:spPr>
           <a:xfrm>
-            <a:off x="304800" y="-15564"/>
-            <a:ext cx="11544300" cy="6186309"/>
+            <a:off x="0" y="-15564"/>
+            <a:ext cx="12192000" cy="6186309"/>
           </a:xfrm>
           <a:prstGeom prst="rect">
             <a:avLst/>
           </a:prstGeom>
         </p:spPr>
         <p:txBody>
-          <a:bodyPr wrap="square">
+          <a:bodyPr wrap="square" lIns="360000" rIns="360000">
             <a:spAutoFit/>
           </a:bodyPr>
           <a:lstStyle/>
@@ -11969,15 +11525,15 @@
         </p:nvSpPr>
         <p:spPr>
           <a:xfrm>
-            <a:off x="314325" y="-15564"/>
-            <a:ext cx="11572876" cy="3416320"/>
+            <a:off x="0" y="0"/>
+            <a:ext cx="12192000" cy="3416320"/>
           </a:xfrm>
           <a:prstGeom prst="rect">
             <a:avLst/>
           </a:prstGeom>
         </p:spPr>
         <p:txBody>
-          <a:bodyPr wrap="square">
+          <a:bodyPr wrap="square" lIns="360000" rIns="360000">
             <a:spAutoFit/>
           </a:bodyPr>
           <a:lstStyle/>
